--- a/Documentation/Presentation/ELEC5620-GROUP 56.pptx
+++ b/Documentation/Presentation/ELEC5620-GROUP 56.pptx
@@ -261,7 +261,7 @@
             <a:fld id="{8A528A56-0C09-9D45-AF38-2EB719AA1485}" type="datetimeFigureOut">
               <a:rPr lang="en-US" smtClean="0"/>
               <a:pPr/>
-              <a:t>10/5/2023</a:t>
+              <a:t>10/11/23</a:t>
             </a:fld>
             <a:endParaRPr lang="en-US" dirty="0"/>
           </a:p>
@@ -7791,7 +7791,7 @@
                 </a:solidFill>
                 <a:latin typeface="Tw Cen MT" charset="0"/>
               </a:rPr>
-              <a:t>(</a:t>
+              <a:t>(I</a:t>
             </a:r>
             <a:r>
               <a:rPr lang="en-US" altLang="zh-CN" b="0" i="1" dirty="0">
@@ -7800,7 +7800,7 @@
                 </a:solidFill>
                 <a:latin typeface="Tw Cen MT" charset="0"/>
               </a:rPr>
-              <a:t>an intelligent image &amp; text creation system</a:t>
+              <a:t>ntelligent image &amp; text creation system</a:t>
             </a:r>
             <a:r>
               <a:rPr lang="en-US" b="0" i="1" dirty="0">
@@ -11696,10 +11696,10 @@
           <a:lstStyle/>
           <a:p>
             <a:r>
-              <a:rPr lang="en-AU" altLang="zh-CN" dirty="0" err="1">
+              <a:rPr lang="en-AU" altLang="zh-CN" dirty="0">
                 <a:cs typeface="ＭＳ Ｐゴシック" charset="0"/>
               </a:rPr>
-              <a:t>Backgroud</a:t>
+              <a:t>Background</a:t>
             </a:r>
             <a:endParaRPr lang="zh-CN" altLang="en-US" dirty="0"/>
           </a:p>
@@ -11726,7 +11726,85 @@
           <a:bodyPr/>
           <a:lstStyle/>
           <a:p>
-            <a:endParaRPr lang="zh-CN" altLang="en-US" dirty="0"/>
+            <a:r>
+              <a:rPr lang="en-US" altLang="zh-CN" dirty="0">
+                <a:highlight>
+                  <a:srgbClr val="00FF00"/>
+                </a:highlight>
+              </a:rPr>
+              <a:t>Scenario</a:t>
+            </a:r>
+          </a:p>
+          <a:p>
+            <a:r>
+              <a:rPr lang="en-US" altLang="zh-CN" dirty="0">
+                <a:highlight>
+                  <a:srgbClr val="00FF00"/>
+                </a:highlight>
+              </a:rPr>
+              <a:t>Motivation</a:t>
+            </a:r>
+          </a:p>
+          <a:p>
+            <a:r>
+              <a:rPr lang="en-US" altLang="zh-CN" dirty="0">
+                <a:highlight>
+                  <a:srgbClr val="FFFF00"/>
+                </a:highlight>
+              </a:rPr>
+              <a:t>Proposed requirement and their classifications</a:t>
+            </a:r>
+          </a:p>
+          <a:p>
+            <a:r>
+              <a:rPr lang="en-US" altLang="zh-CN" dirty="0">
+                <a:highlight>
+                  <a:srgbClr val="FFFF00"/>
+                </a:highlight>
+              </a:rPr>
+              <a:t>Proposed design, including</a:t>
+            </a:r>
+            <a:r>
+              <a:rPr lang="en-GB" altLang="zh-HK" dirty="0">
+                <a:highlight>
+                  <a:srgbClr val="FFFF00"/>
+                </a:highlight>
+              </a:rPr>
+              <a:t> the rationale for the design choices made</a:t>
+            </a:r>
+          </a:p>
+          <a:p>
+            <a:r>
+              <a:rPr lang="en-GB" altLang="zh-CN" dirty="0">
+                <a:highlight>
+                  <a:srgbClr val="00FFFF"/>
+                </a:highlight>
+              </a:rPr>
+              <a:t>Overview of models </a:t>
+            </a:r>
+            <a:r>
+              <a:rPr lang="en-GB" altLang="zh-CN" dirty="0">
+                <a:highlight>
+                  <a:srgbClr val="FF00FF"/>
+                </a:highlight>
+              </a:rPr>
+              <a:t>(include diagrams)</a:t>
+            </a:r>
+          </a:p>
+          <a:p>
+            <a:r>
+              <a:rPr lang="en-GB" altLang="zh-CN" dirty="0">
+                <a:highlight>
+                  <a:srgbClr val="008080"/>
+                </a:highlight>
+              </a:rPr>
+              <a:t>Basis for change assessment and acceptance determination</a:t>
+            </a:r>
+            <a:endParaRPr lang="en-US" altLang="zh-CN" dirty="0">
+              <a:highlight>
+                <a:srgbClr val="008080"/>
+              </a:highlight>
+            </a:endParaRPr>
           </a:p>
         </p:txBody>
       </p:sp>
